--- a/スライド/ch12.pptx
+++ b/スライド/ch12.pptx
@@ -607,13 +607,13 @@
           <a:lstStyle/>
           <a:p>
             <a:r>
-              <a:t>③が名前の由来。損失を二乗誤差から変えれば、分位点回帰にもロバスト回帰にもなる。</a:t>
+              <a:t>前の 1 枚に ② を足しただけ。薄い段はまだ出していない段。</a:t>
             </a:r>
           </a:p>
           <a:p/>
           <a:p>
             <a:r>
-              <a:t>_class: sections</a:t>
+              <a:t>_class: figure-full</a:t>
             </a:r>
           </a:p>
         </p:txBody>
@@ -683,13 +683,13 @@
           <a:lstStyle/>
           <a:p>
             <a:r>
-              <a:t>③が名前の由来。損失を二乗誤差から変えれば、分位点回帰にもロバスト回帰にもなる。</a:t>
+              <a:t>前の 1 枚に ③ を足しただけ。薄い段はまだ出していない段。</a:t>
             </a:r>
           </a:p>
           <a:p/>
           <a:p>
             <a:r>
-              <a:t>_class: sections</a:t>
+              <a:t>_class: figure-full</a:t>
             </a:r>
           </a:p>
         </p:txBody>
@@ -2681,7 +2681,7 @@
           <a:p/>
           <a:p>
             <a:r>
-              <a:t>_class: sections</a:t>
+              <a:t>_class: figure-full</a:t>
             </a:r>
           </a:p>
         </p:txBody>
@@ -6642,59 +6642,14 @@
       <p:grpSpPr/>
       <p:sp>
         <p:nvSpPr>
-          <p:cNvPr id="2" name="TextBox 1"/>
+          <p:cNvPr id="2" name="edge:title"/>
           <p:cNvSpPr txBox="1"/>
           <p:nvPr/>
         </p:nvSpPr>
         <p:spPr>
           <a:xfrm>
-            <a:off x="566928" y="457200"/>
-            <a:ext cx="11057839" cy="658368"/>
-          </a:xfrm>
-          <a:prstGeom prst="rect">
-            <a:avLst/>
-          </a:prstGeom>
-          <a:noFill/>
-        </p:spPr>
-        <p:txBody>
-          <a:bodyPr wrap="square" lIns="0" rIns="0" tIns="0" bIns="0" anchor="ctr">
-            <a:noAutofit/>
-          </a:bodyPr>
-          <a:lstStyle/>
-          <a:p>
-            <a:pPr>
-              <a:lnSpc>
-                <a:spcPct val="106000"/>
-              </a:lnSpc>
-              <a:defRPr sz="3390" b="1">
-                <a:solidFill>
-                  <a:srgbClr val="7C332A"/>
-                </a:solidFill>
-                <a:latin typeface="Avenir Next"/>
-                <a:ea typeface="Hiragino Sans"/>
-                <a:cs typeface="Hiragino Sans"/>
-              </a:defRPr>
-            </a:pPr>
-            <a:r>
-              <a:rPr>
-                <a:ea typeface="Hiragino Sans"/>
-                <a:cs typeface="Hiragino Sans"/>
-              </a:rPr>
-              <a:t>導出 — 勾配ブースティングの考え方</a:t>
-            </a:r>
-          </a:p>
-        </p:txBody>
-      </p:sp>
-      <p:sp>
-        <p:nvSpPr>
-          <p:cNvPr id="3" name="TextBox 2"/>
-          <p:cNvSpPr txBox="1"/>
-          <p:nvPr/>
-        </p:nvSpPr>
-        <p:spPr>
-          <a:xfrm>
-            <a:off x="566928" y="2229993"/>
-            <a:ext cx="11057839" cy="254000"/>
+            <a:off x="566928" y="146304"/>
+            <a:ext cx="11057839" cy="457200"/>
           </a:xfrm>
           <a:prstGeom prst="rect">
             <a:avLst/>
@@ -6707,30 +6662,60 @@
           </a:bodyPr>
           <a:lstStyle/>
           <a:p>
-            <a:r>
-              <a:rPr sz="1600" b="1">
-                <a:solidFill>
-                  <a:srgbClr val="5C7268"/>
-                </a:solidFill>
-                <a:latin typeface="Avenir Next"/>
-                <a:ea typeface="Hiragino Sans"/>
-                <a:cs typeface="Hiragino Sans"/>
-              </a:rPr>
-              <a:t>① まず平均で予測する｜F₀ = ȳ</a:t>
-            </a:r>
-          </a:p>
-        </p:txBody>
-      </p:sp>
-      <p:sp>
-        <p:nvSpPr>
-          <p:cNvPr id="4" name="TextBox 3"/>
+            <a:pPr>
+              <a:defRPr sz="2400" b="1">
+                <a:solidFill>
+                  <a:srgbClr val="7C332A"/>
+                </a:solidFill>
+                <a:latin typeface="Avenir Next"/>
+                <a:ea typeface="Hiragino Sans"/>
+                <a:cs typeface="Hiragino Sans"/>
+              </a:defRPr>
+            </a:pPr>
+            <a:r>
+              <a:rPr>
+                <a:ea typeface="Hiragino Sans"/>
+                <a:cs typeface="Hiragino Sans"/>
+              </a:rPr>
+              <a:t>導出 — 勾配ブースティングの考え方</a:t>
+            </a:r>
+          </a:p>
+        </p:txBody>
+      </p:sp>
+      <p:pic>
+        <p:nvPicPr>
+          <p:cNvPr id="3" name="Picture 2" descr="ch12_deriv_boost_2.png"/>
+          <p:cNvPicPr>
+            <a:picLocks noChangeAspect="1"/>
+          </p:cNvPicPr>
+          <p:nvPr/>
+        </p:nvPicPr>
+        <p:blipFill>
+          <a:blip r:embed="rId2"/>
+          <a:stretch>
+            <a:fillRect/>
+          </a:stretch>
+        </p:blipFill>
+        <p:spPr>
+          <a:xfrm>
+            <a:off x="504370" y="713232"/>
+            <a:ext cx="11182955" cy="5532120"/>
+          </a:xfrm>
+          <a:prstGeom prst="rect">
+            <a:avLst/>
+          </a:prstGeom>
+        </p:spPr>
+      </p:pic>
+      <p:sp>
+        <p:nvSpPr>
+          <p:cNvPr id="4" name="edge:caption"/>
           <p:cNvSpPr txBox="1"/>
           <p:nvPr/>
         </p:nvSpPr>
         <p:spPr>
           <a:xfrm>
-            <a:off x="822960" y="2522093"/>
-            <a:ext cx="10801807" cy="385762"/>
+            <a:off x="228600" y="6300216"/>
+            <a:ext cx="11734495" cy="310896"/>
           </a:xfrm>
           <a:prstGeom prst="rect">
             <a:avLst/>
@@ -6743,314 +6728,24 @@
           </a:bodyPr>
           <a:lstStyle/>
           <a:p>
-            <a:pPr>
-              <a:lnSpc>
-                <a:spcPct val="130000"/>
-              </a:lnSpc>
-            </a:pPr>
-            <a:r>
-              <a:rPr sz="1500">
-                <a:solidFill>
-                  <a:srgbClr val="33221E"/>
-                </a:solidFill>
-                <a:latin typeface="Avenir Next"/>
-                <a:ea typeface="Hiragino Sans"/>
-                <a:cs typeface="Hiragino Sans"/>
-              </a:rPr>
-              <a:t>最初のモデルは全データの平均。残差 r = y − F₀ が「まだ説明できていない分」になる。</a:t>
-            </a:r>
-          </a:p>
-        </p:txBody>
-      </p:sp>
-      <p:sp>
-        <p:nvSpPr>
-          <p:cNvPr id="5" name="Rectangle 4"/>
-          <p:cNvSpPr/>
-          <p:nvPr/>
-        </p:nvSpPr>
-        <p:spPr>
-          <a:xfrm>
-            <a:off x="566928" y="3059747"/>
-            <a:ext cx="11057839" cy="9525"/>
-          </a:xfrm>
-          <a:prstGeom prst="rect">
-            <a:avLst/>
-          </a:prstGeom>
-          <a:solidFill>
-            <a:srgbClr val="E5DCCE"/>
-          </a:solidFill>
-          <a:ln>
-            <a:noFill/>
-          </a:ln>
-          <a:effectLst/>
-        </p:spPr>
-        <p:style>
-          <a:lnRef idx="1">
-            <a:schemeClr val="accent1"/>
-          </a:lnRef>
-          <a:fillRef idx="3">
-            <a:schemeClr val="accent1"/>
-          </a:fillRef>
-          <a:effectRef idx="2">
-            <a:schemeClr val="accent1"/>
-          </a:effectRef>
-          <a:fontRef idx="minor">
-            <a:schemeClr val="lt1"/>
-          </a:fontRef>
-        </p:style>
-        <p:txBody>
-          <a:bodyPr rtlCol="0" anchor="ctr"/>
-          <a:lstStyle/>
-          <a:p>
             <a:pPr algn="ctr"/>
-          </a:p>
-        </p:txBody>
-      </p:sp>
-      <p:sp>
-        <p:nvSpPr>
-          <p:cNvPr id="6" name="TextBox 5"/>
-          <p:cNvSpPr txBox="1"/>
-          <p:nvPr/>
-        </p:nvSpPr>
-        <p:spPr>
-          <a:xfrm>
-            <a:off x="566928" y="3237039"/>
-            <a:ext cx="11057839" cy="254000"/>
-          </a:xfrm>
-          <a:prstGeom prst="rect">
-            <a:avLst/>
-          </a:prstGeom>
-          <a:noFill/>
-        </p:spPr>
-        <p:txBody>
-          <a:bodyPr wrap="none" lIns="0" rIns="0" tIns="0" bIns="0">
-            <a:noAutofit/>
-          </a:bodyPr>
-          <a:lstStyle/>
-          <a:p>
-            <a:r>
-              <a:rPr sz="1600" b="1">
-                <a:solidFill>
-                  <a:srgbClr val="5C7268"/>
-                </a:solidFill>
-                <a:latin typeface="Avenir Next"/>
-                <a:ea typeface="Hiragino Sans"/>
-                <a:cs typeface="Hiragino Sans"/>
-              </a:rPr>
-              <a:t>② 残差を木で学ぶ｜h₁ ≈ r</a:t>
-            </a:r>
-          </a:p>
-        </p:txBody>
-      </p:sp>
-      <p:sp>
-        <p:nvSpPr>
-          <p:cNvPr id="7" name="TextBox 6"/>
-          <p:cNvSpPr txBox="1"/>
-          <p:nvPr/>
-        </p:nvSpPr>
-        <p:spPr>
-          <a:xfrm>
-            <a:off x="822960" y="3529139"/>
-            <a:ext cx="10801807" cy="385762"/>
-          </a:xfrm>
-          <a:prstGeom prst="rect">
-            <a:avLst/>
-          </a:prstGeom>
-          <a:noFill/>
-        </p:spPr>
-        <p:txBody>
-          <a:bodyPr wrap="square" lIns="0" rIns="0" tIns="0" bIns="0">
-            <a:noAutofit/>
-          </a:bodyPr>
-          <a:lstStyle/>
-          <a:p>
-            <a:pPr>
-              <a:lnSpc>
-                <a:spcPct val="130000"/>
-              </a:lnSpc>
-            </a:pPr>
-            <a:r>
-              <a:rPr sz="1500">
-                <a:solidFill>
-                  <a:srgbClr val="33221E"/>
-                </a:solidFill>
-                <a:latin typeface="Avenir Next"/>
-                <a:ea typeface="Hiragino Sans"/>
-                <a:cs typeface="Hiragino Sans"/>
-              </a:rPr>
-              <a:t>浅い木（深さ 2〜6）で残差を近似する。これを </a:t>
-            </a:r>
-            <a:r>
-              <a:rPr sz="1500" b="1">
-                <a:solidFill>
-                  <a:srgbClr val="33221E"/>
-                </a:solidFill>
-                <a:latin typeface="Avenir Next"/>
-                <a:ea typeface="Hiragino Sans"/>
-                <a:cs typeface="Hiragino Sans"/>
-              </a:rPr>
-              <a:t>F₁ = F₀ + ν h₁</a:t>
-            </a:r>
-            <a:r>
-              <a:rPr sz="1500">
-                <a:solidFill>
-                  <a:srgbClr val="33221E"/>
-                </a:solidFill>
-                <a:latin typeface="Avenir Next"/>
-                <a:ea typeface="Hiragino Sans"/>
-                <a:cs typeface="Hiragino Sans"/>
-              </a:rPr>
-              <a:t> として足す。ν は学習率で 0.05〜0.3。</a:t>
-            </a:r>
-          </a:p>
-        </p:txBody>
-      </p:sp>
-      <p:sp>
-        <p:nvSpPr>
-          <p:cNvPr id="8" name="Rectangle 7"/>
-          <p:cNvSpPr/>
-          <p:nvPr/>
-        </p:nvSpPr>
-        <p:spPr>
-          <a:xfrm>
-            <a:off x="566928" y="4066793"/>
-            <a:ext cx="11057839" cy="9525"/>
-          </a:xfrm>
-          <a:prstGeom prst="rect">
-            <a:avLst/>
-          </a:prstGeom>
-          <a:solidFill>
-            <a:srgbClr val="E5DCCE"/>
-          </a:solidFill>
-          <a:ln>
-            <a:noFill/>
-          </a:ln>
-          <a:effectLst/>
-        </p:spPr>
-        <p:style>
-          <a:lnRef idx="1">
-            <a:schemeClr val="accent1"/>
-          </a:lnRef>
-          <a:fillRef idx="3">
-            <a:schemeClr val="accent1"/>
-          </a:fillRef>
-          <a:effectRef idx="2">
-            <a:schemeClr val="accent1"/>
-          </a:effectRef>
-          <a:fontRef idx="minor">
-            <a:schemeClr val="lt1"/>
-          </a:fontRef>
-        </p:style>
-        <p:txBody>
-          <a:bodyPr rtlCol="0" anchor="ctr"/>
-          <a:lstStyle/>
-          <a:p>
-            <a:pPr algn="ctr"/>
-          </a:p>
-        </p:txBody>
-      </p:sp>
-      <p:sp>
-        <p:nvSpPr>
-          <p:cNvPr id="9" name="build:ghost"/>
-          <p:cNvSpPr txBox="1"/>
-          <p:nvPr/>
-        </p:nvSpPr>
-        <p:spPr>
-          <a:xfrm>
-            <a:off x="566928" y="4244085"/>
-            <a:ext cx="11057839" cy="254000"/>
-          </a:xfrm>
-          <a:prstGeom prst="rect">
-            <a:avLst/>
-          </a:prstGeom>
-          <a:noFill/>
-        </p:spPr>
-        <p:txBody>
-          <a:bodyPr wrap="none" lIns="0" rIns="0" tIns="0" bIns="0">
-            <a:noAutofit/>
-          </a:bodyPr>
-          <a:lstStyle/>
-          <a:p>
-            <a:r>
-              <a:rPr sz="1600" b="1">
-                <a:solidFill>
-                  <a:srgbClr val="C1C9C5"/>
-                </a:solidFill>
-                <a:latin typeface="Avenir Next"/>
-                <a:ea typeface="Hiragino Sans"/>
-                <a:cs typeface="Hiragino Sans"/>
-              </a:rPr>
-              <a:t>③ 繰り返す｜F_m = F_(m−1) + ν h_m</a:t>
-            </a:r>
-          </a:p>
-        </p:txBody>
-      </p:sp>
-      <p:sp>
-        <p:nvSpPr>
-          <p:cNvPr id="10" name="build:ghost"/>
-          <p:cNvSpPr txBox="1"/>
-          <p:nvPr/>
-        </p:nvSpPr>
-        <p:spPr>
-          <a:xfrm>
-            <a:off x="822960" y="4536185"/>
-            <a:ext cx="10801807" cy="695325"/>
-          </a:xfrm>
-          <a:prstGeom prst="rect">
-            <a:avLst/>
-          </a:prstGeom>
-          <a:noFill/>
-        </p:spPr>
-        <p:txBody>
-          <a:bodyPr wrap="square" lIns="0" rIns="0" tIns="0" bIns="0">
-            <a:noAutofit/>
-          </a:bodyPr>
-          <a:lstStyle/>
-          <a:p>
-            <a:pPr>
-              <a:lnSpc>
-                <a:spcPct val="130000"/>
-              </a:lnSpc>
-            </a:pPr>
-            <a:r>
-              <a:rPr sz="1500">
-                <a:solidFill>
-                  <a:srgbClr val="C1BCBB"/>
-                </a:solidFill>
-                <a:latin typeface="Avenir Next"/>
-                <a:ea typeface="Hiragino Sans"/>
-                <a:cs typeface="Hiragino Sans"/>
-              </a:rPr>
-              <a:t>新しい残差をまた木で学ぶ。二乗誤差の場合、残差はそのまま損失の負の勾配なので </a:t>
-            </a:r>
-            <a:r>
-              <a:rPr sz="1500" b="1">
-                <a:solidFill>
-                  <a:srgbClr val="C1BCBB"/>
-                </a:solidFill>
-                <a:latin typeface="Avenir Next"/>
-                <a:ea typeface="Hiragino Sans"/>
-                <a:cs typeface="Hiragino Sans"/>
-              </a:rPr>
-              <a:t>勾配降下法を関数空間で行っている</a:t>
-            </a:r>
-            <a:r>
-              <a:rPr sz="1500">
-                <a:solidFill>
-                  <a:srgbClr val="C1BCBB"/>
-                </a:solidFill>
-                <a:latin typeface="Avenir Next"/>
-                <a:ea typeface="Hiragino Sans"/>
-                <a:cs typeface="Hiragino Sans"/>
-              </a:rPr>
-              <a:t>ことになる。</a:t>
-            </a:r>
-          </a:p>
-        </p:txBody>
-      </p:sp>
-      <p:sp>
-        <p:nvSpPr>
-          <p:cNvPr id="11" name="TextBox 10"/>
+            <a:r>
+              <a:rPr sz="1400">
+                <a:solidFill>
+                  <a:srgbClr val="71635B"/>
+                </a:solidFill>
+                <a:latin typeface="Avenir Next"/>
+                <a:ea typeface="Hiragino Sans"/>
+                <a:cs typeface="Hiragino Sans"/>
+              </a:rPr>
+              <a:t>浅い木（深さ 2〜6）で残差を近似する。これを F₁ = F₀ + ν h₁ として足す。ν は学習率で 0.05〜0.3。　出典｜コード/fig_ch12.py</a:t>
+            </a:r>
+          </a:p>
+        </p:txBody>
+      </p:sp>
+      <p:sp>
+        <p:nvSpPr>
+          <p:cNvPr id="5" name="TextBox 4"/>
           <p:cNvSpPr txBox="1"/>
           <p:nvPr/>
         </p:nvSpPr>
@@ -7106,59 +6801,14 @@
       <p:grpSpPr/>
       <p:sp>
         <p:nvSpPr>
-          <p:cNvPr id="2" name="TextBox 1"/>
+          <p:cNvPr id="2" name="edge:title"/>
           <p:cNvSpPr txBox="1"/>
           <p:nvPr/>
         </p:nvSpPr>
         <p:spPr>
           <a:xfrm>
-            <a:off x="566928" y="457200"/>
-            <a:ext cx="11057839" cy="658368"/>
-          </a:xfrm>
-          <a:prstGeom prst="rect">
-            <a:avLst/>
-          </a:prstGeom>
-          <a:noFill/>
-        </p:spPr>
-        <p:txBody>
-          <a:bodyPr wrap="square" lIns="0" rIns="0" tIns="0" bIns="0" anchor="ctr">
-            <a:noAutofit/>
-          </a:bodyPr>
-          <a:lstStyle/>
-          <a:p>
-            <a:pPr>
-              <a:lnSpc>
-                <a:spcPct val="106000"/>
-              </a:lnSpc>
-              <a:defRPr sz="3390" b="1">
-                <a:solidFill>
-                  <a:srgbClr val="7C332A"/>
-                </a:solidFill>
-                <a:latin typeface="Avenir Next"/>
-                <a:ea typeface="Hiragino Sans"/>
-                <a:cs typeface="Hiragino Sans"/>
-              </a:defRPr>
-            </a:pPr>
-            <a:r>
-              <a:rPr>
-                <a:ea typeface="Hiragino Sans"/>
-                <a:cs typeface="Hiragino Sans"/>
-              </a:rPr>
-              <a:t>導出 — 勾配ブースティングの考え方</a:t>
-            </a:r>
-          </a:p>
-        </p:txBody>
-      </p:sp>
-      <p:sp>
-        <p:nvSpPr>
-          <p:cNvPr id="3" name="TextBox 2"/>
-          <p:cNvSpPr txBox="1"/>
-          <p:nvPr/>
-        </p:nvSpPr>
-        <p:spPr>
-          <a:xfrm>
-            <a:off x="566928" y="2229993"/>
-            <a:ext cx="11057839" cy="254000"/>
+            <a:off x="566928" y="146304"/>
+            <a:ext cx="11057839" cy="457200"/>
           </a:xfrm>
           <a:prstGeom prst="rect">
             <a:avLst/>
@@ -7171,30 +6821,60 @@
           </a:bodyPr>
           <a:lstStyle/>
           <a:p>
-            <a:r>
-              <a:rPr sz="1600" b="1">
-                <a:solidFill>
-                  <a:srgbClr val="5C7268"/>
-                </a:solidFill>
-                <a:latin typeface="Avenir Next"/>
-                <a:ea typeface="Hiragino Sans"/>
-                <a:cs typeface="Hiragino Sans"/>
-              </a:rPr>
-              <a:t>① まず平均で予測する｜F₀ = ȳ</a:t>
-            </a:r>
-          </a:p>
-        </p:txBody>
-      </p:sp>
-      <p:sp>
-        <p:nvSpPr>
-          <p:cNvPr id="4" name="TextBox 3"/>
+            <a:pPr>
+              <a:defRPr sz="2400" b="1">
+                <a:solidFill>
+                  <a:srgbClr val="7C332A"/>
+                </a:solidFill>
+                <a:latin typeface="Avenir Next"/>
+                <a:ea typeface="Hiragino Sans"/>
+                <a:cs typeface="Hiragino Sans"/>
+              </a:defRPr>
+            </a:pPr>
+            <a:r>
+              <a:rPr>
+                <a:ea typeface="Hiragino Sans"/>
+                <a:cs typeface="Hiragino Sans"/>
+              </a:rPr>
+              <a:t>導出 — 勾配ブースティングの考え方</a:t>
+            </a:r>
+          </a:p>
+        </p:txBody>
+      </p:sp>
+      <p:pic>
+        <p:nvPicPr>
+          <p:cNvPr id="3" name="Picture 2" descr="ch12_deriv_boost_3.png"/>
+          <p:cNvPicPr>
+            <a:picLocks noChangeAspect="1"/>
+          </p:cNvPicPr>
+          <p:nvPr/>
+        </p:nvPicPr>
+        <p:blipFill>
+          <a:blip r:embed="rId2"/>
+          <a:stretch>
+            <a:fillRect/>
+          </a:stretch>
+        </p:blipFill>
+        <p:spPr>
+          <a:xfrm>
+            <a:off x="716425" y="713232"/>
+            <a:ext cx="10758844" cy="5322316"/>
+          </a:xfrm>
+          <a:prstGeom prst="rect">
+            <a:avLst/>
+          </a:prstGeom>
+        </p:spPr>
+      </p:pic>
+      <p:sp>
+        <p:nvSpPr>
+          <p:cNvPr id="4" name="edge:caption"/>
           <p:cNvSpPr txBox="1"/>
           <p:nvPr/>
         </p:nvSpPr>
         <p:spPr>
           <a:xfrm>
-            <a:off x="822960" y="2522093"/>
-            <a:ext cx="10801807" cy="385762"/>
+            <a:off x="228600" y="6090412"/>
+            <a:ext cx="11734495" cy="520700"/>
           </a:xfrm>
           <a:prstGeom prst="rect">
             <a:avLst/>
@@ -7207,314 +6887,24 @@
           </a:bodyPr>
           <a:lstStyle/>
           <a:p>
-            <a:pPr>
-              <a:lnSpc>
-                <a:spcPct val="130000"/>
-              </a:lnSpc>
-            </a:pPr>
-            <a:r>
-              <a:rPr sz="1500">
-                <a:solidFill>
-                  <a:srgbClr val="33221E"/>
-                </a:solidFill>
-                <a:latin typeface="Avenir Next"/>
-                <a:ea typeface="Hiragino Sans"/>
-                <a:cs typeface="Hiragino Sans"/>
-              </a:rPr>
-              <a:t>最初のモデルは全データの平均。残差 r = y − F₀ が「まだ説明できていない分」になる。</a:t>
-            </a:r>
-          </a:p>
-        </p:txBody>
-      </p:sp>
-      <p:sp>
-        <p:nvSpPr>
-          <p:cNvPr id="5" name="Rectangle 4"/>
-          <p:cNvSpPr/>
-          <p:nvPr/>
-        </p:nvSpPr>
-        <p:spPr>
-          <a:xfrm>
-            <a:off x="566928" y="3059747"/>
-            <a:ext cx="11057839" cy="9525"/>
-          </a:xfrm>
-          <a:prstGeom prst="rect">
-            <a:avLst/>
-          </a:prstGeom>
-          <a:solidFill>
-            <a:srgbClr val="E5DCCE"/>
-          </a:solidFill>
-          <a:ln>
-            <a:noFill/>
-          </a:ln>
-          <a:effectLst/>
-        </p:spPr>
-        <p:style>
-          <a:lnRef idx="1">
-            <a:schemeClr val="accent1"/>
-          </a:lnRef>
-          <a:fillRef idx="3">
-            <a:schemeClr val="accent1"/>
-          </a:fillRef>
-          <a:effectRef idx="2">
-            <a:schemeClr val="accent1"/>
-          </a:effectRef>
-          <a:fontRef idx="minor">
-            <a:schemeClr val="lt1"/>
-          </a:fontRef>
-        </p:style>
-        <p:txBody>
-          <a:bodyPr rtlCol="0" anchor="ctr"/>
-          <a:lstStyle/>
-          <a:p>
             <a:pPr algn="ctr"/>
-          </a:p>
-        </p:txBody>
-      </p:sp>
-      <p:sp>
-        <p:nvSpPr>
-          <p:cNvPr id="6" name="TextBox 5"/>
-          <p:cNvSpPr txBox="1"/>
-          <p:nvPr/>
-        </p:nvSpPr>
-        <p:spPr>
-          <a:xfrm>
-            <a:off x="566928" y="3237039"/>
-            <a:ext cx="11057839" cy="254000"/>
-          </a:xfrm>
-          <a:prstGeom prst="rect">
-            <a:avLst/>
-          </a:prstGeom>
-          <a:noFill/>
-        </p:spPr>
-        <p:txBody>
-          <a:bodyPr wrap="none" lIns="0" rIns="0" tIns="0" bIns="0">
-            <a:noAutofit/>
-          </a:bodyPr>
-          <a:lstStyle/>
-          <a:p>
-            <a:r>
-              <a:rPr sz="1600" b="1">
-                <a:solidFill>
-                  <a:srgbClr val="5C7268"/>
-                </a:solidFill>
-                <a:latin typeface="Avenir Next"/>
-                <a:ea typeface="Hiragino Sans"/>
-                <a:cs typeface="Hiragino Sans"/>
-              </a:rPr>
-              <a:t>② 残差を木で学ぶ｜h₁ ≈ r</a:t>
-            </a:r>
-          </a:p>
-        </p:txBody>
-      </p:sp>
-      <p:sp>
-        <p:nvSpPr>
-          <p:cNvPr id="7" name="TextBox 6"/>
-          <p:cNvSpPr txBox="1"/>
-          <p:nvPr/>
-        </p:nvSpPr>
-        <p:spPr>
-          <a:xfrm>
-            <a:off x="822960" y="3529139"/>
-            <a:ext cx="10801807" cy="385762"/>
-          </a:xfrm>
-          <a:prstGeom prst="rect">
-            <a:avLst/>
-          </a:prstGeom>
-          <a:noFill/>
-        </p:spPr>
-        <p:txBody>
-          <a:bodyPr wrap="square" lIns="0" rIns="0" tIns="0" bIns="0">
-            <a:noAutofit/>
-          </a:bodyPr>
-          <a:lstStyle/>
-          <a:p>
-            <a:pPr>
-              <a:lnSpc>
-                <a:spcPct val="130000"/>
-              </a:lnSpc>
-            </a:pPr>
-            <a:r>
-              <a:rPr sz="1500">
-                <a:solidFill>
-                  <a:srgbClr val="33221E"/>
-                </a:solidFill>
-                <a:latin typeface="Avenir Next"/>
-                <a:ea typeface="Hiragino Sans"/>
-                <a:cs typeface="Hiragino Sans"/>
-              </a:rPr>
-              <a:t>浅い木（深さ 2〜6）で残差を近似する。これを </a:t>
-            </a:r>
-            <a:r>
-              <a:rPr sz="1500" b="1">
-                <a:solidFill>
-                  <a:srgbClr val="33221E"/>
-                </a:solidFill>
-                <a:latin typeface="Avenir Next"/>
-                <a:ea typeface="Hiragino Sans"/>
-                <a:cs typeface="Hiragino Sans"/>
-              </a:rPr>
-              <a:t>F₁ = F₀ + ν h₁</a:t>
-            </a:r>
-            <a:r>
-              <a:rPr sz="1500">
-                <a:solidFill>
-                  <a:srgbClr val="33221E"/>
-                </a:solidFill>
-                <a:latin typeface="Avenir Next"/>
-                <a:ea typeface="Hiragino Sans"/>
-                <a:cs typeface="Hiragino Sans"/>
-              </a:rPr>
-              <a:t> として足す。ν は学習率で 0.05〜0.3。</a:t>
-            </a:r>
-          </a:p>
-        </p:txBody>
-      </p:sp>
-      <p:sp>
-        <p:nvSpPr>
-          <p:cNvPr id="8" name="Rectangle 7"/>
-          <p:cNvSpPr/>
-          <p:nvPr/>
-        </p:nvSpPr>
-        <p:spPr>
-          <a:xfrm>
-            <a:off x="566928" y="4066793"/>
-            <a:ext cx="11057839" cy="9525"/>
-          </a:xfrm>
-          <a:prstGeom prst="rect">
-            <a:avLst/>
-          </a:prstGeom>
-          <a:solidFill>
-            <a:srgbClr val="E5DCCE"/>
-          </a:solidFill>
-          <a:ln>
-            <a:noFill/>
-          </a:ln>
-          <a:effectLst/>
-        </p:spPr>
-        <p:style>
-          <a:lnRef idx="1">
-            <a:schemeClr val="accent1"/>
-          </a:lnRef>
-          <a:fillRef idx="3">
-            <a:schemeClr val="accent1"/>
-          </a:fillRef>
-          <a:effectRef idx="2">
-            <a:schemeClr val="accent1"/>
-          </a:effectRef>
-          <a:fontRef idx="minor">
-            <a:schemeClr val="lt1"/>
-          </a:fontRef>
-        </p:style>
-        <p:txBody>
-          <a:bodyPr rtlCol="0" anchor="ctr"/>
-          <a:lstStyle/>
-          <a:p>
-            <a:pPr algn="ctr"/>
-          </a:p>
-        </p:txBody>
-      </p:sp>
-      <p:sp>
-        <p:nvSpPr>
-          <p:cNvPr id="9" name="TextBox 8"/>
-          <p:cNvSpPr txBox="1"/>
-          <p:nvPr/>
-        </p:nvSpPr>
-        <p:spPr>
-          <a:xfrm>
-            <a:off x="566928" y="4244085"/>
-            <a:ext cx="11057839" cy="254000"/>
-          </a:xfrm>
-          <a:prstGeom prst="rect">
-            <a:avLst/>
-          </a:prstGeom>
-          <a:noFill/>
-        </p:spPr>
-        <p:txBody>
-          <a:bodyPr wrap="none" lIns="0" rIns="0" tIns="0" bIns="0">
-            <a:noAutofit/>
-          </a:bodyPr>
-          <a:lstStyle/>
-          <a:p>
-            <a:r>
-              <a:rPr sz="1600" b="1">
-                <a:solidFill>
-                  <a:srgbClr val="5C7268"/>
-                </a:solidFill>
-                <a:latin typeface="Avenir Next"/>
-                <a:ea typeface="Hiragino Sans"/>
-                <a:cs typeface="Hiragino Sans"/>
-              </a:rPr>
-              <a:t>③ 繰り返す｜F_m = F_(m−1) + ν h_m</a:t>
-            </a:r>
-          </a:p>
-        </p:txBody>
-      </p:sp>
-      <p:sp>
-        <p:nvSpPr>
-          <p:cNvPr id="10" name="TextBox 9"/>
-          <p:cNvSpPr txBox="1"/>
-          <p:nvPr/>
-        </p:nvSpPr>
-        <p:spPr>
-          <a:xfrm>
-            <a:off x="822960" y="4536185"/>
-            <a:ext cx="10801807" cy="695325"/>
-          </a:xfrm>
-          <a:prstGeom prst="rect">
-            <a:avLst/>
-          </a:prstGeom>
-          <a:noFill/>
-        </p:spPr>
-        <p:txBody>
-          <a:bodyPr wrap="square" lIns="0" rIns="0" tIns="0" bIns="0">
-            <a:noAutofit/>
-          </a:bodyPr>
-          <a:lstStyle/>
-          <a:p>
-            <a:pPr>
-              <a:lnSpc>
-                <a:spcPct val="130000"/>
-              </a:lnSpc>
-            </a:pPr>
-            <a:r>
-              <a:rPr sz="1500">
-                <a:solidFill>
-                  <a:srgbClr val="33221E"/>
-                </a:solidFill>
-                <a:latin typeface="Avenir Next"/>
-                <a:ea typeface="Hiragino Sans"/>
-                <a:cs typeface="Hiragino Sans"/>
-              </a:rPr>
-              <a:t>新しい残差をまた木で学ぶ。二乗誤差の場合、残差はそのまま損失の負の勾配なので </a:t>
-            </a:r>
-            <a:r>
-              <a:rPr sz="1500" b="1">
-                <a:solidFill>
-                  <a:srgbClr val="33221E"/>
-                </a:solidFill>
-                <a:latin typeface="Avenir Next"/>
-                <a:ea typeface="Hiragino Sans"/>
-                <a:cs typeface="Hiragino Sans"/>
-              </a:rPr>
-              <a:t>勾配降下法を関数空間で行っている</a:t>
-            </a:r>
-            <a:r>
-              <a:rPr sz="1500">
-                <a:solidFill>
-                  <a:srgbClr val="33221E"/>
-                </a:solidFill>
-                <a:latin typeface="Avenir Next"/>
-                <a:ea typeface="Hiragino Sans"/>
-                <a:cs typeface="Hiragino Sans"/>
-              </a:rPr>
-              <a:t>ことになる。</a:t>
-            </a:r>
-          </a:p>
-        </p:txBody>
-      </p:sp>
-      <p:sp>
-        <p:nvSpPr>
-          <p:cNvPr id="11" name="TextBox 10"/>
+            <a:r>
+              <a:rPr sz="1400">
+                <a:solidFill>
+                  <a:srgbClr val="71635B"/>
+                </a:solidFill>
+                <a:latin typeface="Avenir Next"/>
+                <a:ea typeface="Hiragino Sans"/>
+                <a:cs typeface="Hiragino Sans"/>
+              </a:rPr>
+              <a:t>新しい残差をまた木で学ぶ。二乗誤差の場合、残差はそのまま損失の負の勾配なので 勾配降下法を関数空間で行っていることになる。　出典｜コード/fig_ch12.py</a:t>
+            </a:r>
+          </a:p>
+        </p:txBody>
+      </p:sp>
+      <p:sp>
+        <p:nvSpPr>
+          <p:cNvPr id="5" name="TextBox 4"/>
           <p:cNvSpPr txBox="1"/>
           <p:nvPr/>
         </p:nvSpPr>
@@ -16600,59 +15990,14 @@
       <p:grpSpPr/>
       <p:sp>
         <p:nvSpPr>
-          <p:cNvPr id="2" name="TextBox 1"/>
+          <p:cNvPr id="2" name="edge:title"/>
           <p:cNvSpPr txBox="1"/>
           <p:nvPr/>
         </p:nvSpPr>
         <p:spPr>
           <a:xfrm>
-            <a:off x="566928" y="457200"/>
-            <a:ext cx="11057839" cy="658368"/>
-          </a:xfrm>
-          <a:prstGeom prst="rect">
-            <a:avLst/>
-          </a:prstGeom>
-          <a:noFill/>
-        </p:spPr>
-        <p:txBody>
-          <a:bodyPr wrap="square" lIns="0" rIns="0" tIns="0" bIns="0" anchor="ctr">
-            <a:noAutofit/>
-          </a:bodyPr>
-          <a:lstStyle/>
-          <a:p>
-            <a:pPr>
-              <a:lnSpc>
-                <a:spcPct val="106000"/>
-              </a:lnSpc>
-              <a:defRPr sz="3390" b="1">
-                <a:solidFill>
-                  <a:srgbClr val="7C332A"/>
-                </a:solidFill>
-                <a:latin typeface="Avenir Next"/>
-                <a:ea typeface="Hiragino Sans"/>
-                <a:cs typeface="Hiragino Sans"/>
-              </a:defRPr>
-            </a:pPr>
-            <a:r>
-              <a:rPr>
-                <a:ea typeface="Hiragino Sans"/>
-                <a:cs typeface="Hiragino Sans"/>
-              </a:rPr>
-              <a:t>導出 — 勾配ブースティングの考え方</a:t>
-            </a:r>
-          </a:p>
-        </p:txBody>
-      </p:sp>
-      <p:sp>
-        <p:nvSpPr>
-          <p:cNvPr id="3" name="TextBox 2"/>
-          <p:cNvSpPr txBox="1"/>
-          <p:nvPr/>
-        </p:nvSpPr>
-        <p:spPr>
-          <a:xfrm>
-            <a:off x="566928" y="2229993"/>
-            <a:ext cx="11057839" cy="254000"/>
+            <a:off x="566928" y="146304"/>
+            <a:ext cx="11057839" cy="457200"/>
           </a:xfrm>
           <a:prstGeom prst="rect">
             <a:avLst/>
@@ -16665,30 +16010,60 @@
           </a:bodyPr>
           <a:lstStyle/>
           <a:p>
-            <a:r>
-              <a:rPr sz="1600" b="1">
-                <a:solidFill>
-                  <a:srgbClr val="5C7268"/>
-                </a:solidFill>
-                <a:latin typeface="Avenir Next"/>
-                <a:ea typeface="Hiragino Sans"/>
-                <a:cs typeface="Hiragino Sans"/>
-              </a:rPr>
-              <a:t>① まず平均で予測する｜F₀ = ȳ</a:t>
-            </a:r>
-          </a:p>
-        </p:txBody>
-      </p:sp>
-      <p:sp>
-        <p:nvSpPr>
-          <p:cNvPr id="4" name="TextBox 3"/>
+            <a:pPr>
+              <a:defRPr sz="2400" b="1">
+                <a:solidFill>
+                  <a:srgbClr val="7C332A"/>
+                </a:solidFill>
+                <a:latin typeface="Avenir Next"/>
+                <a:ea typeface="Hiragino Sans"/>
+                <a:cs typeface="Hiragino Sans"/>
+              </a:defRPr>
+            </a:pPr>
+            <a:r>
+              <a:rPr>
+                <a:ea typeface="Hiragino Sans"/>
+                <a:cs typeface="Hiragino Sans"/>
+              </a:rPr>
+              <a:t>導出 — 勾配ブースティングの考え方</a:t>
+            </a:r>
+          </a:p>
+        </p:txBody>
+      </p:sp>
+      <p:pic>
+        <p:nvPicPr>
+          <p:cNvPr id="3" name="Picture 2" descr="ch12_deriv_boost_1.png"/>
+          <p:cNvPicPr>
+            <a:picLocks noChangeAspect="1"/>
+          </p:cNvPicPr>
+          <p:nvPr/>
+        </p:nvPicPr>
+        <p:blipFill>
+          <a:blip r:embed="rId2"/>
+          <a:stretch>
+            <a:fillRect/>
+          </a:stretch>
+        </p:blipFill>
+        <p:spPr>
+          <a:xfrm>
+            <a:off x="504370" y="713232"/>
+            <a:ext cx="11182955" cy="5532120"/>
+          </a:xfrm>
+          <a:prstGeom prst="rect">
+            <a:avLst/>
+          </a:prstGeom>
+        </p:spPr>
+      </p:pic>
+      <p:sp>
+        <p:nvSpPr>
+          <p:cNvPr id="4" name="edge:caption"/>
           <p:cNvSpPr txBox="1"/>
           <p:nvPr/>
         </p:nvSpPr>
         <p:spPr>
           <a:xfrm>
-            <a:off x="822960" y="2522093"/>
-            <a:ext cx="10801807" cy="385762"/>
+            <a:off x="228600" y="6300216"/>
+            <a:ext cx="11734495" cy="310896"/>
           </a:xfrm>
           <a:prstGeom prst="rect">
             <a:avLst/>
@@ -16701,314 +16076,24 @@
           </a:bodyPr>
           <a:lstStyle/>
           <a:p>
-            <a:pPr>
-              <a:lnSpc>
-                <a:spcPct val="130000"/>
-              </a:lnSpc>
-            </a:pPr>
-            <a:r>
-              <a:rPr sz="1500">
-                <a:solidFill>
-                  <a:srgbClr val="33221E"/>
-                </a:solidFill>
-                <a:latin typeface="Avenir Next"/>
-                <a:ea typeface="Hiragino Sans"/>
-                <a:cs typeface="Hiragino Sans"/>
-              </a:rPr>
-              <a:t>最初のモデルは全データの平均。残差 r = y − F₀ が「まだ説明できていない分」になる。</a:t>
-            </a:r>
-          </a:p>
-        </p:txBody>
-      </p:sp>
-      <p:sp>
-        <p:nvSpPr>
-          <p:cNvPr id="5" name="Rectangle 4"/>
-          <p:cNvSpPr/>
-          <p:nvPr/>
-        </p:nvSpPr>
-        <p:spPr>
-          <a:xfrm>
-            <a:off x="566928" y="3059747"/>
-            <a:ext cx="11057839" cy="9525"/>
-          </a:xfrm>
-          <a:prstGeom prst="rect">
-            <a:avLst/>
-          </a:prstGeom>
-          <a:solidFill>
-            <a:srgbClr val="E5DCCE"/>
-          </a:solidFill>
-          <a:ln>
-            <a:noFill/>
-          </a:ln>
-          <a:effectLst/>
-        </p:spPr>
-        <p:style>
-          <a:lnRef idx="1">
-            <a:schemeClr val="accent1"/>
-          </a:lnRef>
-          <a:fillRef idx="3">
-            <a:schemeClr val="accent1"/>
-          </a:fillRef>
-          <a:effectRef idx="2">
-            <a:schemeClr val="accent1"/>
-          </a:effectRef>
-          <a:fontRef idx="minor">
-            <a:schemeClr val="lt1"/>
-          </a:fontRef>
-        </p:style>
-        <p:txBody>
-          <a:bodyPr rtlCol="0" anchor="ctr"/>
-          <a:lstStyle/>
-          <a:p>
             <a:pPr algn="ctr"/>
-          </a:p>
-        </p:txBody>
-      </p:sp>
-      <p:sp>
-        <p:nvSpPr>
-          <p:cNvPr id="6" name="build:ghost"/>
-          <p:cNvSpPr txBox="1"/>
-          <p:nvPr/>
-        </p:nvSpPr>
-        <p:spPr>
-          <a:xfrm>
-            <a:off x="566928" y="3237039"/>
-            <a:ext cx="11057839" cy="254000"/>
-          </a:xfrm>
-          <a:prstGeom prst="rect">
-            <a:avLst/>
-          </a:prstGeom>
-          <a:noFill/>
-        </p:spPr>
-        <p:txBody>
-          <a:bodyPr wrap="none" lIns="0" rIns="0" tIns="0" bIns="0">
-            <a:noAutofit/>
-          </a:bodyPr>
-          <a:lstStyle/>
-          <a:p>
-            <a:r>
-              <a:rPr sz="1600" b="1">
-                <a:solidFill>
-                  <a:srgbClr val="C1C9C5"/>
-                </a:solidFill>
-                <a:latin typeface="Avenir Next"/>
-                <a:ea typeface="Hiragino Sans"/>
-                <a:cs typeface="Hiragino Sans"/>
-              </a:rPr>
-              <a:t>② 残差を木で学ぶ｜h₁ ≈ r</a:t>
-            </a:r>
-          </a:p>
-        </p:txBody>
-      </p:sp>
-      <p:sp>
-        <p:nvSpPr>
-          <p:cNvPr id="7" name="build:ghost"/>
-          <p:cNvSpPr txBox="1"/>
-          <p:nvPr/>
-        </p:nvSpPr>
-        <p:spPr>
-          <a:xfrm>
-            <a:off x="822960" y="3529139"/>
-            <a:ext cx="10801807" cy="385762"/>
-          </a:xfrm>
-          <a:prstGeom prst="rect">
-            <a:avLst/>
-          </a:prstGeom>
-          <a:noFill/>
-        </p:spPr>
-        <p:txBody>
-          <a:bodyPr wrap="square" lIns="0" rIns="0" tIns="0" bIns="0">
-            <a:noAutofit/>
-          </a:bodyPr>
-          <a:lstStyle/>
-          <a:p>
-            <a:pPr>
-              <a:lnSpc>
-                <a:spcPct val="130000"/>
-              </a:lnSpc>
-            </a:pPr>
-            <a:r>
-              <a:rPr sz="1500">
-                <a:solidFill>
-                  <a:srgbClr val="C1BCBB"/>
-                </a:solidFill>
-                <a:latin typeface="Avenir Next"/>
-                <a:ea typeface="Hiragino Sans"/>
-                <a:cs typeface="Hiragino Sans"/>
-              </a:rPr>
-              <a:t>浅い木（深さ 2〜6）で残差を近似する。これを </a:t>
-            </a:r>
-            <a:r>
-              <a:rPr sz="1500" b="1">
-                <a:solidFill>
-                  <a:srgbClr val="C1BCBB"/>
-                </a:solidFill>
-                <a:latin typeface="Avenir Next"/>
-                <a:ea typeface="Hiragino Sans"/>
-                <a:cs typeface="Hiragino Sans"/>
-              </a:rPr>
-              <a:t>F₁ = F₀ + ν h₁</a:t>
-            </a:r>
-            <a:r>
-              <a:rPr sz="1500">
-                <a:solidFill>
-                  <a:srgbClr val="C1BCBB"/>
-                </a:solidFill>
-                <a:latin typeface="Avenir Next"/>
-                <a:ea typeface="Hiragino Sans"/>
-                <a:cs typeface="Hiragino Sans"/>
-              </a:rPr>
-              <a:t> として足す。ν は学習率で 0.05〜0.3。</a:t>
-            </a:r>
-          </a:p>
-        </p:txBody>
-      </p:sp>
-      <p:sp>
-        <p:nvSpPr>
-          <p:cNvPr id="8" name="Rectangle 7"/>
-          <p:cNvSpPr/>
-          <p:nvPr/>
-        </p:nvSpPr>
-        <p:spPr>
-          <a:xfrm>
-            <a:off x="566928" y="4066793"/>
-            <a:ext cx="11057839" cy="9525"/>
-          </a:xfrm>
-          <a:prstGeom prst="rect">
-            <a:avLst/>
-          </a:prstGeom>
-          <a:solidFill>
-            <a:srgbClr val="E5DCCE"/>
-          </a:solidFill>
-          <a:ln>
-            <a:noFill/>
-          </a:ln>
-          <a:effectLst/>
-        </p:spPr>
-        <p:style>
-          <a:lnRef idx="1">
-            <a:schemeClr val="accent1"/>
-          </a:lnRef>
-          <a:fillRef idx="3">
-            <a:schemeClr val="accent1"/>
-          </a:fillRef>
-          <a:effectRef idx="2">
-            <a:schemeClr val="accent1"/>
-          </a:effectRef>
-          <a:fontRef idx="minor">
-            <a:schemeClr val="lt1"/>
-          </a:fontRef>
-        </p:style>
-        <p:txBody>
-          <a:bodyPr rtlCol="0" anchor="ctr"/>
-          <a:lstStyle/>
-          <a:p>
-            <a:pPr algn="ctr"/>
-          </a:p>
-        </p:txBody>
-      </p:sp>
-      <p:sp>
-        <p:nvSpPr>
-          <p:cNvPr id="9" name="build:ghost"/>
-          <p:cNvSpPr txBox="1"/>
-          <p:nvPr/>
-        </p:nvSpPr>
-        <p:spPr>
-          <a:xfrm>
-            <a:off x="566928" y="4244085"/>
-            <a:ext cx="11057839" cy="254000"/>
-          </a:xfrm>
-          <a:prstGeom prst="rect">
-            <a:avLst/>
-          </a:prstGeom>
-          <a:noFill/>
-        </p:spPr>
-        <p:txBody>
-          <a:bodyPr wrap="none" lIns="0" rIns="0" tIns="0" bIns="0">
-            <a:noAutofit/>
-          </a:bodyPr>
-          <a:lstStyle/>
-          <a:p>
-            <a:r>
-              <a:rPr sz="1600" b="1">
-                <a:solidFill>
-                  <a:srgbClr val="C1C9C5"/>
-                </a:solidFill>
-                <a:latin typeface="Avenir Next"/>
-                <a:ea typeface="Hiragino Sans"/>
-                <a:cs typeface="Hiragino Sans"/>
-              </a:rPr>
-              <a:t>③ 繰り返す｜F_m = F_(m−1) + ν h_m</a:t>
-            </a:r>
-          </a:p>
-        </p:txBody>
-      </p:sp>
-      <p:sp>
-        <p:nvSpPr>
-          <p:cNvPr id="10" name="build:ghost"/>
-          <p:cNvSpPr txBox="1"/>
-          <p:nvPr/>
-        </p:nvSpPr>
-        <p:spPr>
-          <a:xfrm>
-            <a:off x="822960" y="4536185"/>
-            <a:ext cx="10801807" cy="695325"/>
-          </a:xfrm>
-          <a:prstGeom prst="rect">
-            <a:avLst/>
-          </a:prstGeom>
-          <a:noFill/>
-        </p:spPr>
-        <p:txBody>
-          <a:bodyPr wrap="square" lIns="0" rIns="0" tIns="0" bIns="0">
-            <a:noAutofit/>
-          </a:bodyPr>
-          <a:lstStyle/>
-          <a:p>
-            <a:pPr>
-              <a:lnSpc>
-                <a:spcPct val="130000"/>
-              </a:lnSpc>
-            </a:pPr>
-            <a:r>
-              <a:rPr sz="1500">
-                <a:solidFill>
-                  <a:srgbClr val="C1BCBB"/>
-                </a:solidFill>
-                <a:latin typeface="Avenir Next"/>
-                <a:ea typeface="Hiragino Sans"/>
-                <a:cs typeface="Hiragino Sans"/>
-              </a:rPr>
-              <a:t>新しい残差をまた木で学ぶ。二乗誤差の場合、残差はそのまま損失の負の勾配なので </a:t>
-            </a:r>
-            <a:r>
-              <a:rPr sz="1500" b="1">
-                <a:solidFill>
-                  <a:srgbClr val="C1BCBB"/>
-                </a:solidFill>
-                <a:latin typeface="Avenir Next"/>
-                <a:ea typeface="Hiragino Sans"/>
-                <a:cs typeface="Hiragino Sans"/>
-              </a:rPr>
-              <a:t>勾配降下法を関数空間で行っている</a:t>
-            </a:r>
-            <a:r>
-              <a:rPr sz="1500">
-                <a:solidFill>
-                  <a:srgbClr val="C1BCBB"/>
-                </a:solidFill>
-                <a:latin typeface="Avenir Next"/>
-                <a:ea typeface="Hiragino Sans"/>
-                <a:cs typeface="Hiragino Sans"/>
-              </a:rPr>
-              <a:t>ことになる。</a:t>
-            </a:r>
-          </a:p>
-        </p:txBody>
-      </p:sp>
-      <p:sp>
-        <p:nvSpPr>
-          <p:cNvPr id="11" name="TextBox 10"/>
+            <a:r>
+              <a:rPr sz="1400">
+                <a:solidFill>
+                  <a:srgbClr val="71635B"/>
+                </a:solidFill>
+                <a:latin typeface="Avenir Next"/>
+                <a:ea typeface="Hiragino Sans"/>
+                <a:cs typeface="Hiragino Sans"/>
+              </a:rPr>
+              <a:t>最初のモデルは全データの平均。残差 r = y − F₀ が「まだ説明できていない分」になる。　出典｜コード/fig_ch12.py</a:t>
+            </a:r>
+          </a:p>
+        </p:txBody>
+      </p:sp>
+      <p:sp>
+        <p:nvSpPr>
+          <p:cNvPr id="5" name="TextBox 4"/>
           <p:cNvSpPr txBox="1"/>
           <p:nvPr/>
         </p:nvSpPr>
